--- a/ml_course_ru/semester_2/lecture_04_multiagent_systems/lecture_04_multiagent.pptx
+++ b/ml_course_ru/semester_2/lecture_04_multiagent_systems/lecture_04_multiagent.pptx
@@ -24,6 +24,7 @@
     <p:sldId id="267" r:id="rId18"/>
     <p:sldId id="268" r:id="rId19"/>
     <p:sldId id="269" r:id="rId20"/>
+    <p:sldId id="311" r:id="rId21"/>
   </p:sldIdLst>
   <p:sldSz cx="9144000" cy="6858000" type="screen4x3"/>
   <p:notesSz cx="6858000" cy="9144000"/>
@@ -320,7 +321,7 @@
           <a:p>
             <a:fld id="{5BCAD085-E8A6-8845-BD4E-CB4CCA059FC4}" type="datetimeFigureOut">
               <a:rPr lang="en-US" smtClean="0"/>
-              <a:t>11/25/2024</a:t>
+              <a:t>11/23/25</a:t>
             </a:fld>
             <a:endParaRPr lang="en-US"/>
           </a:p>
@@ -488,7 +489,7 @@
           <a:p>
             <a:fld id="{5BCAD085-E8A6-8845-BD4E-CB4CCA059FC4}" type="datetimeFigureOut">
               <a:rPr lang="en-US" smtClean="0"/>
-              <a:t>11/25/2024</a:t>
+              <a:t>11/23/25</a:t>
             </a:fld>
             <a:endParaRPr lang="en-US"/>
           </a:p>
@@ -666,7 +667,7 @@
           <a:p>
             <a:fld id="{5BCAD085-E8A6-8845-BD4E-CB4CCA059FC4}" type="datetimeFigureOut">
               <a:rPr lang="en-US" smtClean="0"/>
-              <a:t>11/25/2024</a:t>
+              <a:t>11/23/25</a:t>
             </a:fld>
             <a:endParaRPr lang="en-US"/>
           </a:p>
@@ -834,7 +835,7 @@
           <a:p>
             <a:fld id="{5BCAD085-E8A6-8845-BD4E-CB4CCA059FC4}" type="datetimeFigureOut">
               <a:rPr lang="en-US" smtClean="0"/>
-              <a:t>11/25/2024</a:t>
+              <a:t>11/23/25</a:t>
             </a:fld>
             <a:endParaRPr lang="en-US"/>
           </a:p>
@@ -1079,7 +1080,7 @@
           <a:p>
             <a:fld id="{5BCAD085-E8A6-8845-BD4E-CB4CCA059FC4}" type="datetimeFigureOut">
               <a:rPr lang="en-US" smtClean="0"/>
-              <a:t>11/25/2024</a:t>
+              <a:t>11/23/25</a:t>
             </a:fld>
             <a:endParaRPr lang="en-US"/>
           </a:p>
@@ -1364,7 +1365,7 @@
           <a:p>
             <a:fld id="{5BCAD085-E8A6-8845-BD4E-CB4CCA059FC4}" type="datetimeFigureOut">
               <a:rPr lang="en-US" smtClean="0"/>
-              <a:t>11/25/2024</a:t>
+              <a:t>11/23/25</a:t>
             </a:fld>
             <a:endParaRPr lang="en-US"/>
           </a:p>
@@ -1783,7 +1784,7 @@
           <a:p>
             <a:fld id="{5BCAD085-E8A6-8845-BD4E-CB4CCA059FC4}" type="datetimeFigureOut">
               <a:rPr lang="en-US" smtClean="0"/>
-              <a:t>11/25/2024</a:t>
+              <a:t>11/23/25</a:t>
             </a:fld>
             <a:endParaRPr lang="en-US"/>
           </a:p>
@@ -1900,7 +1901,7 @@
           <a:p>
             <a:fld id="{5BCAD085-E8A6-8845-BD4E-CB4CCA059FC4}" type="datetimeFigureOut">
               <a:rPr lang="en-US" smtClean="0"/>
-              <a:t>11/25/2024</a:t>
+              <a:t>11/23/25</a:t>
             </a:fld>
             <a:endParaRPr lang="en-US"/>
           </a:p>
@@ -1995,7 +1996,7 @@
           <a:p>
             <a:fld id="{5BCAD085-E8A6-8845-BD4E-CB4CCA059FC4}" type="datetimeFigureOut">
               <a:rPr lang="en-US" smtClean="0"/>
-              <a:t>11/25/2024</a:t>
+              <a:t>11/23/25</a:t>
             </a:fld>
             <a:endParaRPr lang="en-US"/>
           </a:p>
@@ -2270,7 +2271,7 @@
           <a:p>
             <a:fld id="{5BCAD085-E8A6-8845-BD4E-CB4CCA059FC4}" type="datetimeFigureOut">
               <a:rPr lang="en-US" smtClean="0"/>
-              <a:t>11/25/2024</a:t>
+              <a:t>11/23/25</a:t>
             </a:fld>
             <a:endParaRPr lang="en-US"/>
           </a:p>
@@ -2522,7 +2523,7 @@
           <a:p>
             <a:fld id="{5BCAD085-E8A6-8845-BD4E-CB4CCA059FC4}" type="datetimeFigureOut">
               <a:rPr lang="en-US" smtClean="0"/>
-              <a:t>11/25/2024</a:t>
+              <a:t>11/23/25</a:t>
             </a:fld>
             <a:endParaRPr lang="en-US"/>
           </a:p>
@@ -2733,7 +2734,7 @@
           <a:p>
             <a:fld id="{5BCAD085-E8A6-8845-BD4E-CB4CCA059FC4}" type="datetimeFigureOut">
               <a:rPr lang="en-US" smtClean="0"/>
-              <a:t>11/25/2024</a:t>
+              <a:t>11/23/25</a:t>
             </a:fld>
             <a:endParaRPr lang="en-US"/>
           </a:p>
@@ -3268,15 +3269,7 @@
             </a:r>
             <a:r>
               <a:rPr lang="ru-RU" sz="1800" dirty="0"/>
-              <a:t> подход </a:t>
-            </a:r>
-            <a:r>
-              <a:rPr lang="ru-RU" sz="1800" dirty="0" err="1"/>
-              <a:t>подход</a:t>
-            </a:r>
-            <a:r>
-              <a:rPr lang="ru-RU" sz="1800" dirty="0"/>
-              <a:t> Джини (равномерная полезность)</a:t>
+              <a:t> подход Джини (равномерная полезность)</a:t>
             </a:r>
           </a:p>
           <a:p>
@@ -4198,8 +4191,26 @@
           <a:lstStyle/>
           <a:p>
             <a:r>
-              <a:t>Методы разработки МАС: Основы</a:t>
-            </a:r>
+              <a:rPr dirty="0" err="1"/>
+              <a:t>Методы</a:t>
+            </a:r>
+            <a:r>
+              <a:rPr dirty="0"/>
+              <a:t> </a:t>
+            </a:r>
+            <a:r>
+              <a:rPr dirty="0" err="1"/>
+              <a:t>разработки</a:t>
+            </a:r>
+            <a:r>
+              <a:rPr dirty="0"/>
+              <a:t> МАС: </a:t>
+            </a:r>
+            <a:r>
+              <a:rPr dirty="0" err="1"/>
+              <a:t>Основы</a:t>
+            </a:r>
+            <a:endParaRPr dirty="0"/>
           </a:p>
         </p:txBody>
       </p:sp>
@@ -4219,18 +4230,124 @@
           <a:lstStyle/>
           <a:p>
             <a:r>
-              <a:t>- Bottom-up и Top-down подходы</a:t>
-            </a:r>
-          </a:p>
-          <a:p>
-            <a:r>
-              <a:t>- Примеры разработки с нуля и на основе существующих систем</a:t>
-            </a:r>
-          </a:p>
-          <a:p>
-            <a:r>
-              <a:t>- Проблемы при проектировании</a:t>
-            </a:r>
+              <a:rPr dirty="0"/>
+              <a:t>- Bottom-up </a:t>
+            </a:r>
+            <a:r>
+              <a:rPr dirty="0" err="1"/>
+              <a:t>и</a:t>
+            </a:r>
+            <a:r>
+              <a:rPr dirty="0"/>
+              <a:t> Top-down </a:t>
+            </a:r>
+            <a:r>
+              <a:rPr dirty="0" err="1"/>
+              <a:t>подходы</a:t>
+            </a:r>
+            <a:endParaRPr dirty="0"/>
+          </a:p>
+          <a:p>
+            <a:r>
+              <a:rPr dirty="0"/>
+              <a:t>- </a:t>
+            </a:r>
+            <a:r>
+              <a:rPr dirty="0" err="1"/>
+              <a:t>Примеры</a:t>
+            </a:r>
+            <a:r>
+              <a:rPr dirty="0"/>
+              <a:t> </a:t>
+            </a:r>
+            <a:r>
+              <a:rPr dirty="0" err="1"/>
+              <a:t>разработки</a:t>
+            </a:r>
+            <a:r>
+              <a:rPr dirty="0"/>
+              <a:t> </a:t>
+            </a:r>
+            <a:r>
+              <a:rPr dirty="0" err="1"/>
+              <a:t>с</a:t>
+            </a:r>
+            <a:r>
+              <a:rPr dirty="0"/>
+              <a:t> </a:t>
+            </a:r>
+            <a:r>
+              <a:rPr dirty="0" err="1"/>
+              <a:t>нуля</a:t>
+            </a:r>
+            <a:r>
+              <a:rPr dirty="0"/>
+              <a:t> </a:t>
+            </a:r>
+            <a:r>
+              <a:rPr dirty="0" err="1"/>
+              <a:t>и</a:t>
+            </a:r>
+            <a:r>
+              <a:rPr dirty="0"/>
+              <a:t> </a:t>
+            </a:r>
+            <a:r>
+              <a:rPr dirty="0" err="1"/>
+              <a:t>на</a:t>
+            </a:r>
+            <a:r>
+              <a:rPr dirty="0"/>
+              <a:t> </a:t>
+            </a:r>
+            <a:r>
+              <a:rPr dirty="0" err="1"/>
+              <a:t>основе</a:t>
+            </a:r>
+            <a:r>
+              <a:rPr dirty="0"/>
+              <a:t> </a:t>
+            </a:r>
+            <a:r>
+              <a:rPr dirty="0" err="1"/>
+              <a:t>существующих</a:t>
+            </a:r>
+            <a:r>
+              <a:rPr dirty="0"/>
+              <a:t> </a:t>
+            </a:r>
+            <a:r>
+              <a:rPr dirty="0" err="1"/>
+              <a:t>систем</a:t>
+            </a:r>
+            <a:endParaRPr dirty="0"/>
+          </a:p>
+          <a:p>
+            <a:r>
+              <a:rPr dirty="0"/>
+              <a:t>- </a:t>
+            </a:r>
+            <a:r>
+              <a:rPr dirty="0" err="1"/>
+              <a:t>Проблемы</a:t>
+            </a:r>
+            <a:r>
+              <a:rPr dirty="0"/>
+              <a:t> </a:t>
+            </a:r>
+            <a:r>
+              <a:rPr dirty="0" err="1"/>
+              <a:t>при</a:t>
+            </a:r>
+            <a:r>
+              <a:rPr dirty="0"/>
+              <a:t> </a:t>
+            </a:r>
+            <a:r>
+              <a:rPr dirty="0" err="1"/>
+              <a:t>проектировании</a:t>
+            </a:r>
+            <a:endParaRPr dirty="0"/>
           </a:p>
         </p:txBody>
       </p:sp>
@@ -4277,8 +4394,26 @@
           <a:lstStyle/>
           <a:p>
             <a:r>
-              <a:t>Методы разработки МАС: Алгоритмы</a:t>
-            </a:r>
+              <a:rPr dirty="0" err="1"/>
+              <a:t>Методы</a:t>
+            </a:r>
+            <a:r>
+              <a:rPr dirty="0"/>
+              <a:t> </a:t>
+            </a:r>
+            <a:r>
+              <a:rPr dirty="0" err="1"/>
+              <a:t>разработки</a:t>
+            </a:r>
+            <a:r>
+              <a:rPr dirty="0"/>
+              <a:t> МАС: </a:t>
+            </a:r>
+            <a:r>
+              <a:rPr dirty="0" err="1"/>
+              <a:t>Алгоритмы</a:t>
+            </a:r>
+            <a:endParaRPr dirty="0"/>
           </a:p>
         </p:txBody>
       </p:sp>
@@ -4298,17 +4433,89 @@
           <a:lstStyle/>
           <a:p>
             <a:r>
-              <a:t>- Алгоритм контрактной сети</a:t>
-            </a:r>
-          </a:p>
-          <a:p>
-            <a:r>
-              <a:t>- Swarm intelligence (управление роем)</a:t>
-            </a:r>
-          </a:p>
-          <a:p>
-            <a:r>
-              <a:t>- Обучение с подкреплением в МАС</a:t>
+              <a:rPr dirty="0"/>
+              <a:t>- </a:t>
+            </a:r>
+            <a:r>
+              <a:rPr dirty="0" err="1"/>
+              <a:t>Алгоритм</a:t>
+            </a:r>
+            <a:r>
+              <a:rPr dirty="0"/>
+              <a:t> </a:t>
+            </a:r>
+            <a:r>
+              <a:rPr dirty="0" err="1"/>
+              <a:t>контрактной</a:t>
+            </a:r>
+            <a:r>
+              <a:rPr dirty="0"/>
+              <a:t> </a:t>
+            </a:r>
+            <a:r>
+              <a:rPr dirty="0" err="1"/>
+              <a:t>сети</a:t>
+            </a:r>
+            <a:endParaRPr dirty="0"/>
+          </a:p>
+          <a:p>
+            <a:r>
+              <a:rPr dirty="0"/>
+              <a:t>- Swarm intelligence (</a:t>
+            </a:r>
+            <a:r>
+              <a:rPr dirty="0" err="1"/>
+              <a:t>управление</a:t>
+            </a:r>
+            <a:r>
+              <a:rPr dirty="0"/>
+              <a:t> </a:t>
+            </a:r>
+            <a:r>
+              <a:rPr dirty="0" err="1"/>
+              <a:t>роем</a:t>
+            </a:r>
+            <a:r>
+              <a:rPr dirty="0"/>
+              <a:t>)</a:t>
+            </a:r>
+          </a:p>
+          <a:p>
+            <a:r>
+              <a:rPr dirty="0"/>
+              <a:t>- </a:t>
+            </a:r>
+            <a:r>
+              <a:rPr dirty="0" err="1"/>
+              <a:t>Обучение</a:t>
+            </a:r>
+            <a:r>
+              <a:rPr dirty="0"/>
+              <a:t> </a:t>
+            </a:r>
+            <a:r>
+              <a:rPr dirty="0" err="1"/>
+              <a:t>с</a:t>
+            </a:r>
+            <a:r>
+              <a:rPr dirty="0"/>
+              <a:t> </a:t>
+            </a:r>
+            <a:r>
+              <a:rPr dirty="0" err="1"/>
+              <a:t>подкреплением</a:t>
+            </a:r>
+            <a:r>
+              <a:rPr dirty="0"/>
+              <a:t> </a:t>
+            </a:r>
+            <a:r>
+              <a:rPr dirty="0" err="1"/>
+              <a:t>в</a:t>
+            </a:r>
+            <a:r>
+              <a:rPr dirty="0"/>
+              <a:t> МАС</a:t>
             </a:r>
           </a:p>
         </p:txBody>
@@ -4356,8 +4563,26 @@
           <a:lstStyle/>
           <a:p>
             <a:r>
-              <a:t>Методы разработки МАС: Фреймворки</a:t>
-            </a:r>
+              <a:rPr dirty="0" err="1"/>
+              <a:t>Методы</a:t>
+            </a:r>
+            <a:r>
+              <a:rPr dirty="0"/>
+              <a:t> </a:t>
+            </a:r>
+            <a:r>
+              <a:rPr dirty="0" err="1"/>
+              <a:t>разработки</a:t>
+            </a:r>
+            <a:r>
+              <a:rPr dirty="0"/>
+              <a:t> МАС: </a:t>
+            </a:r>
+            <a:r>
+              <a:rPr dirty="0" err="1"/>
+              <a:t>Фреймворки</a:t>
+            </a:r>
+            <a:endParaRPr dirty="0"/>
           </a:p>
         </p:txBody>
       </p:sp>
@@ -4377,18 +4602,42 @@
           <a:lstStyle/>
           <a:p>
             <a:r>
+              <a:rPr dirty="0"/>
               <a:t>- JADE (Java Agent Development Framework)</a:t>
             </a:r>
           </a:p>
           <a:p>
             <a:r>
+              <a:rPr dirty="0"/>
               <a:t>- Python-based MESA</a:t>
             </a:r>
           </a:p>
           <a:p>
             <a:r>
-              <a:t>- Демонстрация использования фреймворков</a:t>
-            </a:r>
+              <a:rPr dirty="0"/>
+              <a:t>- </a:t>
+            </a:r>
+            <a:r>
+              <a:rPr dirty="0" err="1"/>
+              <a:t>Демонстрация</a:t>
+            </a:r>
+            <a:r>
+              <a:rPr dirty="0"/>
+              <a:t> </a:t>
+            </a:r>
+            <a:r>
+              <a:rPr dirty="0" err="1"/>
+              <a:t>использования</a:t>
+            </a:r>
+            <a:r>
+              <a:rPr dirty="0"/>
+              <a:t> </a:t>
+            </a:r>
+            <a:r>
+              <a:rPr dirty="0" err="1"/>
+              <a:t>фреймворков</a:t>
+            </a:r>
+            <a:endParaRPr dirty="0"/>
           </a:p>
         </p:txBody>
       </p:sp>
@@ -4454,23 +4703,87 @@
           <a:lstStyle/>
           <a:p>
             <a:r>
-              <a:t>- Масштабируемость</a:t>
-            </a:r>
-          </a:p>
-          <a:p>
-            <a:r>
-              <a:t>- Надежность и отказоустойчивость</a:t>
-            </a:r>
-          </a:p>
-          <a:p>
-            <a:r>
-              <a:t>- Безопасность и приватность</a:t>
-            </a:r>
-          </a:p>
-          <a:p>
-            <a:r>
-              <a:t>- Этические вопросы</a:t>
-            </a:r>
+              <a:rPr dirty="0"/>
+              <a:t>- </a:t>
+            </a:r>
+            <a:r>
+              <a:rPr dirty="0" err="1"/>
+              <a:t>Масштабируемость</a:t>
+            </a:r>
+            <a:endParaRPr dirty="0"/>
+          </a:p>
+          <a:p>
+            <a:r>
+              <a:rPr dirty="0"/>
+              <a:t>- </a:t>
+            </a:r>
+            <a:r>
+              <a:rPr dirty="0" err="1"/>
+              <a:t>Надежность</a:t>
+            </a:r>
+            <a:r>
+              <a:rPr dirty="0"/>
+              <a:t> </a:t>
+            </a:r>
+            <a:r>
+              <a:rPr dirty="0" err="1"/>
+              <a:t>и</a:t>
+            </a:r>
+            <a:r>
+              <a:rPr dirty="0"/>
+              <a:t> </a:t>
+            </a:r>
+            <a:r>
+              <a:rPr dirty="0" err="1"/>
+              <a:t>отказоустойчивость</a:t>
+            </a:r>
+            <a:endParaRPr dirty="0"/>
+          </a:p>
+          <a:p>
+            <a:r>
+              <a:rPr dirty="0"/>
+              <a:t>- </a:t>
+            </a:r>
+            <a:r>
+              <a:rPr dirty="0" err="1"/>
+              <a:t>Безопасность</a:t>
+            </a:r>
+            <a:r>
+              <a:rPr dirty="0"/>
+              <a:t> </a:t>
+            </a:r>
+            <a:r>
+              <a:rPr dirty="0" err="1"/>
+              <a:t>и</a:t>
+            </a:r>
+            <a:r>
+              <a:rPr dirty="0"/>
+              <a:t> </a:t>
+            </a:r>
+            <a:r>
+              <a:rPr dirty="0" err="1"/>
+              <a:t>приватность</a:t>
+            </a:r>
+            <a:endParaRPr dirty="0"/>
+          </a:p>
+          <a:p>
+            <a:r>
+              <a:rPr dirty="0"/>
+              <a:t>- </a:t>
+            </a:r>
+            <a:r>
+              <a:rPr dirty="0" err="1"/>
+              <a:t>Этические</a:t>
+            </a:r>
+            <a:r>
+              <a:rPr dirty="0"/>
+              <a:t> </a:t>
+            </a:r>
+            <a:r>
+              <a:rPr dirty="0" err="1"/>
+              <a:t>вопросы</a:t>
+            </a:r>
+            <a:endParaRPr dirty="0"/>
           </a:p>
         </p:txBody>
       </p:sp>
@@ -4538,23 +4851,138 @@
           <a:lstStyle/>
           <a:p>
             <a:r>
-              <a:t>- Использование ИИ в МАС</a:t>
-            </a:r>
-          </a:p>
-          <a:p>
-            <a:r>
-              <a:t>- Многоагентное обучение</a:t>
-            </a:r>
-          </a:p>
-          <a:p>
-            <a:r>
-              <a:t>- Применение в метавселенных и распределённых виртуальных средах</a:t>
-            </a:r>
-          </a:p>
-          <a:p>
-            <a:r>
-              <a:t>- Будущее автономных транспортных систем</a:t>
-            </a:r>
+              <a:rPr dirty="0"/>
+              <a:t>- </a:t>
+            </a:r>
+            <a:r>
+              <a:rPr dirty="0" err="1"/>
+              <a:t>Использование</a:t>
+            </a:r>
+            <a:r>
+              <a:rPr dirty="0"/>
+              <a:t> ИИ </a:t>
+            </a:r>
+            <a:r>
+              <a:rPr dirty="0" err="1"/>
+              <a:t>в</a:t>
+            </a:r>
+            <a:r>
+              <a:rPr dirty="0"/>
+              <a:t> МАС</a:t>
+            </a:r>
+          </a:p>
+          <a:p>
+            <a:r>
+              <a:rPr dirty="0"/>
+              <a:t>- </a:t>
+            </a:r>
+            <a:r>
+              <a:rPr dirty="0" err="1"/>
+              <a:t>Многоагентное</a:t>
+            </a:r>
+            <a:r>
+              <a:rPr dirty="0"/>
+              <a:t> </a:t>
+            </a:r>
+            <a:r>
+              <a:rPr dirty="0" err="1"/>
+              <a:t>обучение</a:t>
+            </a:r>
+            <a:endParaRPr dirty="0"/>
+          </a:p>
+          <a:p>
+            <a:r>
+              <a:rPr dirty="0"/>
+              <a:t>- </a:t>
+            </a:r>
+            <a:r>
+              <a:rPr dirty="0" err="1"/>
+              <a:t>Применение</a:t>
+            </a:r>
+            <a:r>
+              <a:rPr dirty="0"/>
+              <a:t> </a:t>
+            </a:r>
+            <a:r>
+              <a:rPr dirty="0" err="1"/>
+              <a:t>в</a:t>
+            </a:r>
+            <a:r>
+              <a:rPr dirty="0"/>
+              <a:t> </a:t>
+            </a:r>
+            <a:r>
+              <a:rPr dirty="0" err="1"/>
+              <a:t>метавселенных</a:t>
+            </a:r>
+            <a:r>
+              <a:rPr dirty="0"/>
+              <a:t> </a:t>
+            </a:r>
+            <a:r>
+              <a:rPr dirty="0" err="1"/>
+              <a:t>и</a:t>
+            </a:r>
+            <a:r>
+              <a:rPr dirty="0"/>
+              <a:t> </a:t>
+            </a:r>
+            <a:r>
+              <a:rPr dirty="0" err="1"/>
+              <a:t>распределённых</a:t>
+            </a:r>
+            <a:r>
+              <a:rPr dirty="0"/>
+              <a:t> </a:t>
+            </a:r>
+            <a:r>
+              <a:rPr dirty="0" err="1"/>
+              <a:t>виртуальных</a:t>
+            </a:r>
+            <a:r>
+              <a:rPr dirty="0"/>
+              <a:t> </a:t>
+            </a:r>
+            <a:r>
+              <a:rPr dirty="0" err="1"/>
+              <a:t>средах</a:t>
+            </a:r>
+            <a:endParaRPr dirty="0"/>
+          </a:p>
+          <a:p>
+            <a:r>
+              <a:rPr dirty="0"/>
+              <a:t>- </a:t>
+            </a:r>
+            <a:r>
+              <a:rPr dirty="0" err="1"/>
+              <a:t>Будущее</a:t>
+            </a:r>
+            <a:r>
+              <a:rPr dirty="0"/>
+              <a:t> </a:t>
+            </a:r>
+            <a:r>
+              <a:rPr dirty="0" err="1"/>
+              <a:t>автономных</a:t>
+            </a:r>
+            <a:r>
+              <a:rPr dirty="0"/>
+              <a:t> </a:t>
+            </a:r>
+            <a:r>
+              <a:rPr dirty="0" err="1"/>
+              <a:t>транспортных</a:t>
+            </a:r>
+            <a:r>
+              <a:rPr dirty="0"/>
+              <a:t> </a:t>
+            </a:r>
+            <a:r>
+              <a:rPr dirty="0" err="1"/>
+              <a:t>систем</a:t>
+            </a:r>
+            <a:endParaRPr dirty="0"/>
           </a:p>
         </p:txBody>
       </p:sp>
@@ -4909,6 +5337,738 @@
     <p:extLst>
       <p:ext uri="{BB962C8B-B14F-4D97-AF65-F5344CB8AC3E}">
         <p14:creationId xmlns:p14="http://schemas.microsoft.com/office/powerpoint/2010/main" val="1892458973"/>
+      </p:ext>
+    </p:extLst>
+  </p:cSld>
+  <p:clrMapOvr>
+    <a:masterClrMapping/>
+  </p:clrMapOvr>
+</p:sld>
+</file>
+
+<file path=ppt/slides/slide20.xml><?xml version="1.0" encoding="utf-8"?>
+<p:sld xmlns:a="http://schemas.openxmlformats.org/drawingml/2006/main" xmlns:r="http://schemas.openxmlformats.org/officeDocument/2006/relationships" xmlns:p="http://schemas.openxmlformats.org/presentationml/2006/main">
+  <p:cSld>
+    <p:spTree>
+      <p:nvGrpSpPr>
+        <p:cNvPr id="1" name=""/>
+        <p:cNvGrpSpPr/>
+        <p:nvPr/>
+      </p:nvGrpSpPr>
+      <p:grpSpPr>
+        <a:xfrm>
+          <a:off x="0" y="0"/>
+          <a:ext cx="0" cy="0"/>
+          <a:chOff x="0" y="0"/>
+          <a:chExt cx="0" cy="0"/>
+        </a:xfrm>
+      </p:grpSpPr>
+      <p:sp>
+        <p:nvSpPr>
+          <p:cNvPr id="2" name="Заголовок 1">
+            <a:extLst>
+              <a:ext uri="{FF2B5EF4-FFF2-40B4-BE49-F238E27FC236}">
+                <a16:creationId xmlns:a16="http://schemas.microsoft.com/office/drawing/2014/main" id="{8701E31A-1780-DF2C-EB47-A8E930FCD272}"/>
+              </a:ext>
+            </a:extLst>
+          </p:cNvPr>
+          <p:cNvSpPr>
+            <a:spLocks noGrp="1"/>
+          </p:cNvSpPr>
+          <p:nvPr>
+            <p:ph type="title"/>
+          </p:nvPr>
+        </p:nvSpPr>
+        <p:spPr>
+          <a:xfrm>
+            <a:off x="457200" y="120634"/>
+            <a:ext cx="8229600" cy="736015"/>
+          </a:xfrm>
+        </p:spPr>
+        <p:txBody>
+          <a:bodyPr>
+            <a:normAutofit fontScale="90000"/>
+          </a:bodyPr>
+          <a:lstStyle/>
+          <a:p>
+            <a:pPr algn="l"/>
+            <a:r>
+              <a:rPr lang="ru-RU" dirty="0"/>
+              <a:t>Пример</a:t>
+            </a:r>
+          </a:p>
+        </p:txBody>
+      </p:sp>
+      <p:sp>
+        <p:nvSpPr>
+          <p:cNvPr id="3" name="Объект 2">
+            <a:extLst>
+              <a:ext uri="{FF2B5EF4-FFF2-40B4-BE49-F238E27FC236}">
+                <a16:creationId xmlns:a16="http://schemas.microsoft.com/office/drawing/2014/main" id="{5B498427-5834-AF24-66D2-04B9741FB081}"/>
+              </a:ext>
+            </a:extLst>
+          </p:cNvPr>
+          <p:cNvSpPr>
+            <a:spLocks noGrp="1"/>
+          </p:cNvSpPr>
+          <p:nvPr>
+            <p:ph idx="1"/>
+          </p:nvPr>
+        </p:nvSpPr>
+        <p:spPr>
+          <a:xfrm>
+            <a:off x="457200" y="1166018"/>
+            <a:ext cx="3402531" cy="4525963"/>
+          </a:xfrm>
+        </p:spPr>
+        <p:txBody>
+          <a:bodyPr>
+            <a:normAutofit lnSpcReduction="10000"/>
+          </a:bodyPr>
+          <a:lstStyle/>
+          <a:p>
+            <a:r>
+              <a:rPr lang="ru-RU" sz="1400" dirty="0"/>
+              <a:t>Механизм самоорганизации</a:t>
+            </a:r>
+          </a:p>
+          <a:p>
+            <a:r>
+              <a:rPr lang="ru-RU" sz="1400" b="1" dirty="0"/>
+              <a:t>Назначение задач</a:t>
+            </a:r>
+          </a:p>
+          <a:p>
+            <a:pPr lvl="1"/>
+            <a:r>
+              <a:rPr lang="ru-RU" sz="1200" b="1" dirty="0"/>
+              <a:t>Менеджеры</a:t>
+            </a:r>
+            <a:r>
+              <a:rPr lang="ru-RU" sz="1200" dirty="0"/>
+              <a:t>: Агенты, которые берут на себя организацию задачи	</a:t>
+            </a:r>
+          </a:p>
+          <a:p>
+            <a:pPr lvl="1"/>
+            <a:r>
+              <a:rPr lang="ru-RU" sz="1200" b="1" dirty="0"/>
+              <a:t>Исполнители</a:t>
+            </a:r>
+            <a:r>
+              <a:rPr lang="ru-RU" sz="1200" dirty="0"/>
+              <a:t>: Агенты, присоединяющиеся к задаче по приглашению</a:t>
+            </a:r>
+          </a:p>
+          <a:p>
+            <a:r>
+              <a:rPr lang="ru-RU" sz="1400" b="1" dirty="0"/>
+              <a:t>Процесс работы:</a:t>
+            </a:r>
+          </a:p>
+          <a:p>
+            <a:pPr lvl="1"/>
+            <a:r>
+              <a:rPr lang="ru-RU" sz="1200" b="1" dirty="0"/>
+              <a:t>Поиск задачи</a:t>
+            </a:r>
+            <a:r>
+              <a:rPr lang="ru-RU" sz="1200" dirty="0"/>
+              <a:t>: Свободные агенты ищут незанятые задачи</a:t>
+            </a:r>
+          </a:p>
+          <a:p>
+            <a:pPr lvl="1"/>
+            <a:r>
+              <a:rPr lang="ru-RU" sz="1200" b="1" dirty="0"/>
+              <a:t>Расчет полезности</a:t>
+            </a:r>
+            <a:r>
+              <a:rPr lang="ru-RU" sz="1200" dirty="0"/>
+              <a:t>: Оценивают задачи по формуле:</a:t>
+            </a:r>
+          </a:p>
+          <a:p>
+            <a:pPr marL="457200" lvl="1" indent="0">
+              <a:buNone/>
+            </a:pPr>
+            <a:r>
+              <a:rPr lang="en-US" sz="1200" dirty="0"/>
+              <a:t>utility = (1 / </a:t>
+            </a:r>
+            <a:r>
+              <a:rPr lang="ru-RU" sz="1200" dirty="0"/>
+              <a:t>расстояние) + (</a:t>
+            </a:r>
+            <a:r>
+              <a:rPr lang="ru-RU" sz="1200" dirty="0" err="1"/>
+              <a:t>время_ожидания</a:t>
+            </a:r>
+            <a:r>
+              <a:rPr lang="ru-RU" sz="1200" dirty="0"/>
+              <a:t> / 100)</a:t>
+            </a:r>
+          </a:p>
+          <a:p>
+            <a:pPr lvl="1"/>
+            <a:r>
+              <a:rPr lang="ru-RU" sz="1200" b="1" dirty="0"/>
+              <a:t>Выбор задачи</a:t>
+            </a:r>
+            <a:r>
+              <a:rPr lang="ru-RU" sz="1200" dirty="0"/>
+              <a:t>: Выбирают из 3 лучших вариантов случайным образом</a:t>
+            </a:r>
+          </a:p>
+          <a:p>
+            <a:pPr lvl="1"/>
+            <a:r>
+              <a:rPr lang="ru-RU" sz="1200" b="1" dirty="0"/>
+              <a:t>Координация</a:t>
+            </a:r>
+            <a:r>
+              <a:rPr lang="ru-RU" sz="1200" dirty="0"/>
+              <a:t>: Менеджер привлекает других агентов</a:t>
+            </a:r>
+          </a:p>
+          <a:p>
+            <a:pPr lvl="1"/>
+            <a:r>
+              <a:rPr lang="ru-RU" sz="1200" b="1" dirty="0"/>
+              <a:t>Выполнение</a:t>
+            </a:r>
+            <a:r>
+              <a:rPr lang="ru-RU" sz="1200" dirty="0"/>
+              <a:t>: Все агенты собираются в точке забора → совместно доставляют груз</a:t>
+            </a:r>
+          </a:p>
+          <a:p>
+            <a:endParaRPr lang="ru-RU" sz="1400" dirty="0"/>
+          </a:p>
+        </p:txBody>
+      </p:sp>
+      <p:sp>
+        <p:nvSpPr>
+          <p:cNvPr id="5" name="TextBox 4">
+            <a:extLst>
+              <a:ext uri="{FF2B5EF4-FFF2-40B4-BE49-F238E27FC236}">
+                <a16:creationId xmlns:a16="http://schemas.microsoft.com/office/drawing/2014/main" id="{74C90B10-D339-073B-1123-A8388B678A23}"/>
+              </a:ext>
+            </a:extLst>
+          </p:cNvPr>
+          <p:cNvSpPr txBox="1"/>
+          <p:nvPr/>
+        </p:nvSpPr>
+        <p:spPr>
+          <a:xfrm>
+            <a:off x="4230304" y="120634"/>
+            <a:ext cx="4572000" cy="3780522"/>
+          </a:xfrm>
+          <a:prstGeom prst="rect">
+            <a:avLst/>
+          </a:prstGeom>
+          <a:noFill/>
+        </p:spPr>
+        <p:txBody>
+          <a:bodyPr wrap="square">
+            <a:spAutoFit/>
+          </a:bodyPr>
+          <a:lstStyle/>
+          <a:p>
+            <a:pPr algn="l">
+              <a:lnSpc>
+                <a:spcPts val="2250"/>
+              </a:lnSpc>
+              <a:spcBef>
+                <a:spcPts val="2400"/>
+              </a:spcBef>
+              <a:spcAft>
+                <a:spcPts val="1200"/>
+              </a:spcAft>
+              <a:buNone/>
+            </a:pPr>
+            <a:r>
+              <a:rPr lang="ru-RU" sz="1200" b="1" dirty="0">
+                <a:solidFill>
+                  <a:srgbClr val="0F1115"/>
+                </a:solidFill>
+                <a:effectLst/>
+                <a:latin typeface="quote-cjk-patch"/>
+              </a:rPr>
+              <a:t>Механизмы предотвращения проблем</a:t>
+            </a:r>
+          </a:p>
+          <a:p>
+            <a:pPr algn="l">
+              <a:lnSpc>
+                <a:spcPts val="2100"/>
+              </a:lnSpc>
+              <a:spcBef>
+                <a:spcPts val="1200"/>
+              </a:spcBef>
+              <a:spcAft>
+                <a:spcPts val="600"/>
+              </a:spcAft>
+              <a:buNone/>
+            </a:pPr>
+            <a:r>
+              <a:rPr lang="ru-RU" sz="1200" b="1" dirty="0">
+                <a:solidFill>
+                  <a:srgbClr val="0F1115"/>
+                </a:solidFill>
+                <a:effectLst/>
+                <a:latin typeface="quote-cjk-patch"/>
+              </a:rPr>
+              <a:t>Таймауты:</a:t>
+            </a:r>
+          </a:p>
+          <a:p>
+            <a:pPr marL="285750" indent="-285750" algn="l">
+              <a:lnSpc>
+                <a:spcPts val="1650"/>
+              </a:lnSpc>
+              <a:spcBef>
+                <a:spcPts val="600"/>
+              </a:spcBef>
+              <a:buFont typeface="Arial" panose="020B0604020202020204" pitchFamily="34" charset="0"/>
+              <a:buChar char="•"/>
+            </a:pPr>
+            <a:r>
+              <a:rPr lang="en-US" sz="1200" b="0" i="0" dirty="0" err="1">
+                <a:solidFill>
+                  <a:srgbClr val="0F1115"/>
+                </a:solidFill>
+                <a:effectLst/>
+                <a:latin typeface="Menlo" panose="020B0609030804020204" pitchFamily="49" charset="0"/>
+              </a:rPr>
+              <a:t>wait_cycles</a:t>
+            </a:r>
+            <a:r>
+              <a:rPr lang="en-US" sz="1200" b="0" i="0" dirty="0">
+                <a:solidFill>
+                  <a:srgbClr val="0F1115"/>
+                </a:solidFill>
+                <a:effectLst/>
+                <a:latin typeface="quote-cjk-patch"/>
+              </a:rPr>
+              <a:t> - </a:t>
+            </a:r>
+            <a:r>
+              <a:rPr lang="ru-RU" sz="1200" b="0" i="0" dirty="0">
+                <a:solidFill>
+                  <a:srgbClr val="0F1115"/>
+                </a:solidFill>
+                <a:effectLst/>
+                <a:latin typeface="quote-cjk-patch"/>
+              </a:rPr>
+              <a:t>если задача слишком долго ждет агентов, она отменяется</a:t>
+            </a:r>
+          </a:p>
+          <a:p>
+            <a:pPr marL="285750" indent="-285750" algn="l">
+              <a:lnSpc>
+                <a:spcPts val="1650"/>
+              </a:lnSpc>
+              <a:spcBef>
+                <a:spcPts val="450"/>
+              </a:spcBef>
+              <a:buFont typeface="Arial" panose="020B0604020202020204" pitchFamily="34" charset="0"/>
+              <a:buChar char="•"/>
+            </a:pPr>
+            <a:r>
+              <a:rPr lang="en-US" sz="1200" b="0" i="0" dirty="0" err="1">
+                <a:solidFill>
+                  <a:srgbClr val="0F1115"/>
+                </a:solidFill>
+                <a:effectLst/>
+                <a:latin typeface="Menlo" panose="020B0609030804020204" pitchFamily="49" charset="0"/>
+              </a:rPr>
+              <a:t>reassignment_cooldown</a:t>
+            </a:r>
+            <a:r>
+              <a:rPr lang="en-US" sz="1200" b="0" i="0" dirty="0">
+                <a:solidFill>
+                  <a:srgbClr val="0F1115"/>
+                </a:solidFill>
+                <a:effectLst/>
+                <a:latin typeface="quote-cjk-patch"/>
+              </a:rPr>
+              <a:t> - </a:t>
+            </a:r>
+            <a:r>
+              <a:rPr lang="ru-RU" sz="1200" b="0" i="0" dirty="0">
+                <a:solidFill>
+                  <a:srgbClr val="0F1115"/>
+                </a:solidFill>
+                <a:effectLst/>
+                <a:latin typeface="quote-cjk-patch"/>
+              </a:rPr>
+              <a:t>задержка перед переназначением задачи</a:t>
+            </a:r>
+          </a:p>
+          <a:p>
+            <a:pPr marL="285750" indent="-285750" algn="l">
+              <a:lnSpc>
+                <a:spcPts val="1650"/>
+              </a:lnSpc>
+              <a:spcBef>
+                <a:spcPts val="450"/>
+              </a:spcBef>
+              <a:buFont typeface="Arial" panose="020B0604020202020204" pitchFamily="34" charset="0"/>
+              <a:buChar char="•"/>
+            </a:pPr>
+            <a:r>
+              <a:rPr lang="en-US" sz="1200" b="0" i="0" dirty="0" err="1">
+                <a:solidFill>
+                  <a:srgbClr val="0F1115"/>
+                </a:solidFill>
+                <a:effectLst/>
+                <a:latin typeface="Menlo" panose="020B0609030804020204" pitchFamily="49" charset="0"/>
+              </a:rPr>
+              <a:t>commitment_time</a:t>
+            </a:r>
+            <a:r>
+              <a:rPr lang="en-US" sz="1200" b="0" i="0" dirty="0">
+                <a:solidFill>
+                  <a:srgbClr val="0F1115"/>
+                </a:solidFill>
+                <a:effectLst/>
+                <a:latin typeface="quote-cjk-patch"/>
+              </a:rPr>
+              <a:t> - </a:t>
+            </a:r>
+            <a:r>
+              <a:rPr lang="ru-RU" sz="1200" b="0" i="0" dirty="0">
+                <a:solidFill>
+                  <a:srgbClr val="0F1115"/>
+                </a:solidFill>
+                <a:effectLst/>
+                <a:latin typeface="quote-cjk-patch"/>
+              </a:rPr>
+              <a:t>время обязательства перед задачей</a:t>
+            </a:r>
+          </a:p>
+          <a:p>
+            <a:pPr algn="l">
+              <a:lnSpc>
+                <a:spcPts val="2100"/>
+              </a:lnSpc>
+              <a:spcBef>
+                <a:spcPts val="1200"/>
+              </a:spcBef>
+              <a:spcAft>
+                <a:spcPts val="600"/>
+              </a:spcAft>
+              <a:buNone/>
+            </a:pPr>
+            <a:r>
+              <a:rPr lang="ru-RU" sz="1200" b="1" dirty="0">
+                <a:solidFill>
+                  <a:srgbClr val="0F1115"/>
+                </a:solidFill>
+                <a:effectLst/>
+                <a:latin typeface="quote-cjk-patch"/>
+              </a:rPr>
+              <a:t>Обработка </a:t>
+            </a:r>
+            <a:r>
+              <a:rPr lang="en-US" sz="1200" b="1" dirty="0">
+                <a:solidFill>
+                  <a:srgbClr val="0F1115"/>
+                </a:solidFill>
+                <a:effectLst/>
+                <a:latin typeface="quote-cjk-patch"/>
+              </a:rPr>
+              <a:t>edge cases:</a:t>
+            </a:r>
+          </a:p>
+          <a:p>
+            <a:pPr marL="285750" indent="-285750" algn="l">
+              <a:spcBef>
+                <a:spcPts val="600"/>
+              </a:spcBef>
+              <a:buFont typeface="Arial" panose="020B0604020202020204" pitchFamily="34" charset="0"/>
+              <a:buChar char="•"/>
+            </a:pPr>
+            <a:r>
+              <a:rPr lang="ru-RU" sz="1200" b="0" i="0" dirty="0">
+                <a:solidFill>
+                  <a:srgbClr val="0F1115"/>
+                </a:solidFill>
+                <a:effectLst/>
+                <a:latin typeface="quote-cjk-patch"/>
+              </a:rPr>
+              <a:t>Если не хватает агентов - задача отменяется</a:t>
+            </a:r>
+          </a:p>
+          <a:p>
+            <a:pPr marL="285750" indent="-285750" algn="l">
+              <a:spcBef>
+                <a:spcPts val="450"/>
+              </a:spcBef>
+              <a:buFont typeface="Arial" panose="020B0604020202020204" pitchFamily="34" charset="0"/>
+              <a:buChar char="•"/>
+            </a:pPr>
+            <a:r>
+              <a:rPr lang="ru-RU" sz="1200" b="0" i="0" dirty="0">
+                <a:solidFill>
+                  <a:srgbClr val="0F1115"/>
+                </a:solidFill>
+                <a:effectLst/>
+                <a:latin typeface="quote-cjk-patch"/>
+              </a:rPr>
+              <a:t>Если менеджер ушел - задача продолжается другими агентами</a:t>
+            </a:r>
+          </a:p>
+          <a:p>
+            <a:pPr marL="285750" indent="-285750" algn="l">
+              <a:spcBef>
+                <a:spcPts val="450"/>
+              </a:spcBef>
+              <a:buFont typeface="Arial" panose="020B0604020202020204" pitchFamily="34" charset="0"/>
+              <a:buChar char="•"/>
+            </a:pPr>
+            <a:r>
+              <a:rPr lang="ru-RU" sz="1200" b="0" i="0" dirty="0">
+                <a:solidFill>
+                  <a:srgbClr val="0F1115"/>
+                </a:solidFill>
+                <a:effectLst/>
+                <a:latin typeface="quote-cjk-patch"/>
+              </a:rPr>
+              <a:t>Автоматическое освобождение агентов после выполнения</a:t>
+            </a:r>
+          </a:p>
+        </p:txBody>
+      </p:sp>
+      <p:sp>
+        <p:nvSpPr>
+          <p:cNvPr id="7" name="TextBox 6">
+            <a:extLst>
+              <a:ext uri="{FF2B5EF4-FFF2-40B4-BE49-F238E27FC236}">
+                <a16:creationId xmlns:a16="http://schemas.microsoft.com/office/drawing/2014/main" id="{722F15F6-A9C2-87B6-C426-A7F49CBADD67}"/>
+              </a:ext>
+            </a:extLst>
+          </p:cNvPr>
+          <p:cNvSpPr txBox="1"/>
+          <p:nvPr/>
+        </p:nvSpPr>
+        <p:spPr>
+          <a:xfrm>
+            <a:off x="4230304" y="4265757"/>
+            <a:ext cx="4572000" cy="1982594"/>
+          </a:xfrm>
+          <a:prstGeom prst="rect">
+            <a:avLst/>
+          </a:prstGeom>
+          <a:noFill/>
+        </p:spPr>
+        <p:txBody>
+          <a:bodyPr wrap="square">
+            <a:spAutoFit/>
+          </a:bodyPr>
+          <a:lstStyle/>
+          <a:p>
+            <a:pPr algn="l">
+              <a:lnSpc>
+                <a:spcPts val="2400"/>
+              </a:lnSpc>
+              <a:spcBef>
+                <a:spcPts val="2400"/>
+              </a:spcBef>
+              <a:buNone/>
+            </a:pPr>
+            <a:r>
+              <a:rPr lang="ru-RU" sz="1200" b="1" dirty="0">
+                <a:solidFill>
+                  <a:srgbClr val="0F1115"/>
+                </a:solidFill>
+                <a:effectLst/>
+                <a:latin typeface="quote-cjk-patch"/>
+              </a:rPr>
+              <a:t>Визуализация</a:t>
+            </a:r>
+          </a:p>
+          <a:p>
+            <a:pPr marL="171450" indent="-171450" algn="l">
+              <a:spcBef>
+                <a:spcPts val="1200"/>
+              </a:spcBef>
+              <a:buFont typeface="Arial" panose="020B0604020202020204" pitchFamily="34" charset="0"/>
+              <a:buChar char="•"/>
+            </a:pPr>
+            <a:r>
+              <a:rPr lang="ru-RU" sz="1200" b="1" i="0" dirty="0">
+                <a:solidFill>
+                  <a:srgbClr val="0F1115"/>
+                </a:solidFill>
+                <a:effectLst/>
+                <a:latin typeface="quote-cjk-patch"/>
+              </a:rPr>
+              <a:t>Синие круги</a:t>
+            </a:r>
+            <a:r>
+              <a:rPr lang="ru-RU" sz="1200" b="0" i="0" dirty="0">
+                <a:solidFill>
+                  <a:srgbClr val="0F1115"/>
+                </a:solidFill>
+                <a:effectLst/>
+                <a:latin typeface="quote-cjk-patch"/>
+              </a:rPr>
+              <a:t> - обычные агенты</a:t>
+            </a:r>
+          </a:p>
+          <a:p>
+            <a:pPr marL="171450" indent="-171450" algn="l">
+              <a:spcBef>
+                <a:spcPts val="450"/>
+              </a:spcBef>
+              <a:buFont typeface="Arial" panose="020B0604020202020204" pitchFamily="34" charset="0"/>
+              <a:buChar char="•"/>
+            </a:pPr>
+            <a:r>
+              <a:rPr lang="ru-RU" sz="1200" b="1" i="0" dirty="0">
+                <a:solidFill>
+                  <a:srgbClr val="0F1115"/>
+                </a:solidFill>
+                <a:effectLst/>
+                <a:latin typeface="quote-cjk-patch"/>
+              </a:rPr>
+              <a:t>Желтые круги</a:t>
+            </a:r>
+            <a:r>
+              <a:rPr lang="ru-RU" sz="1200" b="0" i="0" dirty="0">
+                <a:solidFill>
+                  <a:srgbClr val="0F1115"/>
+                </a:solidFill>
+                <a:effectLst/>
+                <a:latin typeface="quote-cjk-patch"/>
+              </a:rPr>
+              <a:t> - агенты-менеджеры</a:t>
+            </a:r>
+          </a:p>
+          <a:p>
+            <a:pPr marL="171450" indent="-171450" algn="l">
+              <a:spcBef>
+                <a:spcPts val="450"/>
+              </a:spcBef>
+              <a:buFont typeface="Arial" panose="020B0604020202020204" pitchFamily="34" charset="0"/>
+              <a:buChar char="•"/>
+            </a:pPr>
+            <a:r>
+              <a:rPr lang="ru-RU" sz="1200" b="1" i="0" dirty="0">
+                <a:solidFill>
+                  <a:srgbClr val="0F1115"/>
+                </a:solidFill>
+                <a:effectLst/>
+                <a:latin typeface="quote-cjk-patch"/>
+              </a:rPr>
+              <a:t>Черные круги</a:t>
+            </a:r>
+            <a:r>
+              <a:rPr lang="ru-RU" sz="1200" b="0" i="0" dirty="0">
+                <a:solidFill>
+                  <a:srgbClr val="0F1115"/>
+                </a:solidFill>
+                <a:effectLst/>
+                <a:latin typeface="quote-cjk-patch"/>
+              </a:rPr>
+              <a:t> - точки забора</a:t>
+            </a:r>
+          </a:p>
+          <a:p>
+            <a:pPr marL="171450" indent="-171450" algn="l">
+              <a:spcBef>
+                <a:spcPts val="450"/>
+              </a:spcBef>
+              <a:buFont typeface="Arial" panose="020B0604020202020204" pitchFamily="34" charset="0"/>
+              <a:buChar char="•"/>
+            </a:pPr>
+            <a:r>
+              <a:rPr lang="ru-RU" sz="1200" b="1" i="0" dirty="0">
+                <a:solidFill>
+                  <a:srgbClr val="0F1115"/>
+                </a:solidFill>
+                <a:effectLst/>
+                <a:latin typeface="quote-cjk-patch"/>
+              </a:rPr>
+              <a:t>Треугольники</a:t>
+            </a:r>
+            <a:r>
+              <a:rPr lang="ru-RU" sz="1200" b="0" i="0" dirty="0">
+                <a:solidFill>
+                  <a:srgbClr val="0F1115"/>
+                </a:solidFill>
+                <a:effectLst/>
+                <a:latin typeface="quote-cjk-patch"/>
+              </a:rPr>
+              <a:t> - точки доставки</a:t>
+            </a:r>
+          </a:p>
+          <a:p>
+            <a:pPr marL="171450" indent="-171450" algn="l">
+              <a:spcBef>
+                <a:spcPts val="450"/>
+              </a:spcBef>
+              <a:buFont typeface="Arial" panose="020B0604020202020204" pitchFamily="34" charset="0"/>
+              <a:buChar char="•"/>
+            </a:pPr>
+            <a:r>
+              <a:rPr lang="ru-RU" sz="1200" b="1" i="0" dirty="0">
+                <a:solidFill>
+                  <a:srgbClr val="0F1115"/>
+                </a:solidFill>
+                <a:effectLst/>
+                <a:latin typeface="quote-cjk-patch"/>
+              </a:rPr>
+              <a:t>Пунктирные линии</a:t>
+            </a:r>
+            <a:r>
+              <a:rPr lang="ru-RU" sz="1200" b="0" i="0" dirty="0">
+                <a:solidFill>
+                  <a:srgbClr val="0F1115"/>
+                </a:solidFill>
+                <a:effectLst/>
+                <a:latin typeface="quote-cjk-patch"/>
+              </a:rPr>
+              <a:t> - маршруты задач</a:t>
+            </a:r>
+          </a:p>
+          <a:p>
+            <a:pPr marL="171450" indent="-171450" algn="l">
+              <a:spcBef>
+                <a:spcPts val="450"/>
+              </a:spcBef>
+              <a:buFont typeface="Arial" panose="020B0604020202020204" pitchFamily="34" charset="0"/>
+              <a:buChar char="•"/>
+            </a:pPr>
+            <a:r>
+              <a:rPr lang="ru-RU" sz="1200" b="1" i="0" dirty="0">
+                <a:solidFill>
+                  <a:srgbClr val="0F1115"/>
+                </a:solidFill>
+                <a:effectLst/>
+                <a:latin typeface="quote-cjk-patch"/>
+              </a:rPr>
+              <a:t>Цифры</a:t>
+            </a:r>
+            <a:r>
+              <a:rPr lang="ru-RU" sz="1200" b="0" i="0" dirty="0">
+                <a:solidFill>
+                  <a:srgbClr val="0F1115"/>
+                </a:solidFill>
+                <a:effectLst/>
+                <a:latin typeface="quote-cjk-patch"/>
+              </a:rPr>
+              <a:t> - количество назначенных/требуемых агентов</a:t>
+            </a:r>
+          </a:p>
+        </p:txBody>
+      </p:sp>
+    </p:spTree>
+    <p:extLst>
+      <p:ext uri="{BB962C8B-B14F-4D97-AF65-F5344CB8AC3E}">
+        <p14:creationId xmlns:p14="http://schemas.microsoft.com/office/powerpoint/2010/main" val="1574449124"/>
       </p:ext>
     </p:extLst>
   </p:cSld>
@@ -6555,23 +7715,7 @@
             </a:r>
             <a:r>
               <a:rPr lang="ru-RU" dirty="0"/>
-              <a:t>предполагает, что агенты  должны </a:t>
-            </a:r>
-            <a:r>
-              <a:rPr lang="ru-RU" dirty="0" err="1"/>
-              <a:t>нимать</a:t>
-            </a:r>
-            <a:r>
-              <a:rPr lang="ru-RU" dirty="0"/>
-              <a:t> свои решения независимо друг от друга. Равновесие Нэша является наиболее важной концепцией решения в теории некооперативных игр. Равновесие Нэша – это профиль стратегии, </a:t>
-            </a:r>
-            <a:r>
-              <a:rPr lang="ru-RU" dirty="0" err="1"/>
-              <a:t>вкотором</a:t>
-            </a:r>
-            <a:r>
-              <a:rPr lang="ru-RU" dirty="0"/>
-              <a:t> ни один из агентов не имеет стимула отклониться от указанной ему стратегии.</a:t>
+              <a:t>предполагает, что агенты  должны принимать свои решения независимо друг от друга. Равновесие Нэша является наиболее важной концепцией решения в теории некооперативных игр. Равновесие Нэша – это профиль стратегии, в котором ни один из агентов не имеет стимула отклониться от указанной ему стратегии.</a:t>
             </a:r>
           </a:p>
           <a:p>
@@ -6603,11 +7747,7 @@
             </a:r>
             <a:r>
               <a:rPr lang="ru-RU" dirty="0"/>
-              <a:t> для эффективного распределения ограниченных </a:t>
-            </a:r>
-            <a:r>
-              <a:rPr lang="ru-RU" dirty="0" err="1"/>
-              <a:t>ресуосов</a:t>
+              <a:t> для эффективного распределения ограниченных ресурсов</a:t>
             </a:r>
             <a:r>
               <a:rPr lang="en-US" dirty="0"/>
